--- a/wordcloud panels.pptx
+++ b/wordcloud panels.pptx
@@ -243,7 +243,7 @@
           <a:p>
             <a:fld id="{F1D6B879-DB3E-3042-954A-95D6175EB813}" type="datetimeFigureOut">
               <a:rPr lang="en-US" smtClean="0"/>
-              <a:t>7/16/26</a:t>
+              <a:t>8/4/26</a:t>
             </a:fld>
             <a:endParaRPr lang="en-US"/>
           </a:p>
@@ -413,7 +413,7 @@
           <a:p>
             <a:fld id="{F1D6B879-DB3E-3042-954A-95D6175EB813}" type="datetimeFigureOut">
               <a:rPr lang="en-US" smtClean="0"/>
-              <a:t>7/16/26</a:t>
+              <a:t>8/4/26</a:t>
             </a:fld>
             <a:endParaRPr lang="en-US"/>
           </a:p>
@@ -593,7 +593,7 @@
           <a:p>
             <a:fld id="{F1D6B879-DB3E-3042-954A-95D6175EB813}" type="datetimeFigureOut">
               <a:rPr lang="en-US" smtClean="0"/>
-              <a:t>7/16/26</a:t>
+              <a:t>8/4/26</a:t>
             </a:fld>
             <a:endParaRPr lang="en-US"/>
           </a:p>
@@ -763,7 +763,7 @@
           <a:p>
             <a:fld id="{F1D6B879-DB3E-3042-954A-95D6175EB813}" type="datetimeFigureOut">
               <a:rPr lang="en-US" smtClean="0"/>
-              <a:t>7/16/26</a:t>
+              <a:t>8/4/26</a:t>
             </a:fld>
             <a:endParaRPr lang="en-US"/>
           </a:p>
@@ -1009,7 +1009,7 @@
           <a:p>
             <a:fld id="{F1D6B879-DB3E-3042-954A-95D6175EB813}" type="datetimeFigureOut">
               <a:rPr lang="en-US" smtClean="0"/>
-              <a:t>7/16/26</a:t>
+              <a:t>8/4/26</a:t>
             </a:fld>
             <a:endParaRPr lang="en-US"/>
           </a:p>
@@ -1241,7 +1241,7 @@
           <a:p>
             <a:fld id="{F1D6B879-DB3E-3042-954A-95D6175EB813}" type="datetimeFigureOut">
               <a:rPr lang="en-US" smtClean="0"/>
-              <a:t>7/16/26</a:t>
+              <a:t>8/4/26</a:t>
             </a:fld>
             <a:endParaRPr lang="en-US"/>
           </a:p>
@@ -1608,7 +1608,7 @@
           <a:p>
             <a:fld id="{F1D6B879-DB3E-3042-954A-95D6175EB813}" type="datetimeFigureOut">
               <a:rPr lang="en-US" smtClean="0"/>
-              <a:t>7/16/26</a:t>
+              <a:t>8/4/26</a:t>
             </a:fld>
             <a:endParaRPr lang="en-US"/>
           </a:p>
@@ -1726,7 +1726,7 @@
           <a:p>
             <a:fld id="{F1D6B879-DB3E-3042-954A-95D6175EB813}" type="datetimeFigureOut">
               <a:rPr lang="en-US" smtClean="0"/>
-              <a:t>7/16/26</a:t>
+              <a:t>8/4/26</a:t>
             </a:fld>
             <a:endParaRPr lang="en-US"/>
           </a:p>
@@ -1821,7 +1821,7 @@
           <a:p>
             <a:fld id="{F1D6B879-DB3E-3042-954A-95D6175EB813}" type="datetimeFigureOut">
               <a:rPr lang="en-US" smtClean="0"/>
-              <a:t>7/16/26</a:t>
+              <a:t>8/4/26</a:t>
             </a:fld>
             <a:endParaRPr lang="en-US"/>
           </a:p>
@@ -2098,7 +2098,7 @@
           <a:p>
             <a:fld id="{F1D6B879-DB3E-3042-954A-95D6175EB813}" type="datetimeFigureOut">
               <a:rPr lang="en-US" smtClean="0"/>
-              <a:t>7/16/26</a:t>
+              <a:t>8/4/26</a:t>
             </a:fld>
             <a:endParaRPr lang="en-US"/>
           </a:p>
@@ -2355,7 +2355,7 @@
           <a:p>
             <a:fld id="{F1D6B879-DB3E-3042-954A-95D6175EB813}" type="datetimeFigureOut">
               <a:rPr lang="en-US" smtClean="0"/>
-              <a:t>7/16/26</a:t>
+              <a:t>8/4/26</a:t>
             </a:fld>
             <a:endParaRPr lang="en-US"/>
           </a:p>
@@ -2568,7 +2568,7 @@
           <a:p>
             <a:fld id="{F1D6B879-DB3E-3042-954A-95D6175EB813}" type="datetimeFigureOut">
               <a:rPr lang="en-US" smtClean="0"/>
-              <a:t>7/16/26</a:t>
+              <a:t>8/4/26</a:t>
             </a:fld>
             <a:endParaRPr lang="en-US"/>
           </a:p>
@@ -2996,7 +2996,7 @@
         </p:blipFill>
         <p:spPr>
           <a:xfrm>
-            <a:off x="524055" y="1425972"/>
+            <a:off x="10056885" y="1370512"/>
             <a:ext cx="8079036" cy="7834220"/>
           </a:xfrm>
           <a:prstGeom prst="rect">
@@ -3018,7 +3018,7 @@
         </p:nvSpPr>
         <p:spPr>
           <a:xfrm>
-            <a:off x="3049546" y="817237"/>
+            <a:off x="12443320" y="160990"/>
             <a:ext cx="3887603" cy="830997"/>
           </a:xfrm>
           <a:prstGeom prst="rect">
@@ -3037,7 +3037,7 @@
                 <a:latin typeface="Arial" panose="020B0604020202020204" pitchFamily="34" charset="0"/>
                 <a:cs typeface="Arial" panose="020B0604020202020204" pitchFamily="34" charset="0"/>
               </a:rPr>
-              <a:t>A. 2005-2009</a:t>
+              <a:t>B. 2005-2009</a:t>
             </a:r>
           </a:p>
         </p:txBody>
@@ -3065,7 +3065,7 @@
         </p:blipFill>
         <p:spPr>
           <a:xfrm>
-            <a:off x="9158809" y="1381665"/>
+            <a:off x="18202381" y="1221162"/>
             <a:ext cx="8687320" cy="7922838"/>
           </a:xfrm>
           <a:prstGeom prst="rect">
@@ -3096,8 +3096,8 @@
         </p:blipFill>
         <p:spPr>
           <a:xfrm>
-            <a:off x="18992247" y="1482195"/>
-            <a:ext cx="7678951" cy="8423037"/>
+            <a:off x="784364" y="10400405"/>
+            <a:ext cx="7190810" cy="7887595"/>
           </a:xfrm>
           <a:prstGeom prst="rect">
             <a:avLst/>
@@ -3127,7 +3127,7 @@
         </p:blipFill>
         <p:spPr>
           <a:xfrm>
-            <a:off x="4502634" y="10117779"/>
+            <a:off x="10292116" y="10459510"/>
             <a:ext cx="8190013" cy="7597913"/>
           </a:xfrm>
           <a:prstGeom prst="rect">
@@ -3158,7 +3158,7 @@
         </p:blipFill>
         <p:spPr>
           <a:xfrm>
-            <a:off x="13838765" y="10117779"/>
+            <a:off x="19629404" y="10433348"/>
             <a:ext cx="7457083" cy="7810464"/>
           </a:xfrm>
           <a:prstGeom prst="rect">
@@ -3180,7 +3180,7 @@
         </p:nvSpPr>
         <p:spPr>
           <a:xfrm>
-            <a:off x="12514540" y="780936"/>
+            <a:off x="21397312" y="160990"/>
             <a:ext cx="3887603" cy="830997"/>
           </a:xfrm>
           <a:prstGeom prst="rect">
@@ -3199,7 +3199,7 @@
                 <a:latin typeface="Arial" panose="020B0604020202020204" pitchFamily="34" charset="0"/>
                 <a:cs typeface="Arial" panose="020B0604020202020204" pitchFamily="34" charset="0"/>
               </a:rPr>
-              <a:t>B. 2010-2014</a:t>
+              <a:t>C. 2010-2014</a:t>
             </a:r>
           </a:p>
         </p:txBody>
@@ -3218,7 +3218,7 @@
         </p:nvSpPr>
         <p:spPr>
           <a:xfrm>
-            <a:off x="21479718" y="817236"/>
+            <a:off x="2554140" y="9569408"/>
             <a:ext cx="3921266" cy="830997"/>
           </a:xfrm>
           <a:prstGeom prst="rect">
@@ -3237,7 +3237,7 @@
                 <a:latin typeface="Arial" panose="020B0604020202020204" pitchFamily="34" charset="0"/>
                 <a:cs typeface="Arial" panose="020B0604020202020204" pitchFamily="34" charset="0"/>
               </a:rPr>
-              <a:t>C. 2015-2019</a:t>
+              <a:t>D. 2015-2019</a:t>
             </a:r>
           </a:p>
         </p:txBody>
@@ -3256,7 +3256,7 @@
         </p:nvSpPr>
         <p:spPr>
           <a:xfrm>
-            <a:off x="6937149" y="9453428"/>
+            <a:off x="12135770" y="9569409"/>
             <a:ext cx="3921266" cy="830997"/>
           </a:xfrm>
           <a:prstGeom prst="rect">
@@ -3275,7 +3275,7 @@
                 <a:latin typeface="Arial" panose="020B0604020202020204" pitchFamily="34" charset="0"/>
                 <a:cs typeface="Arial" panose="020B0604020202020204" pitchFamily="34" charset="0"/>
               </a:rPr>
-              <a:t>D. 2020-2024</a:t>
+              <a:t>E. 2020-2024</a:t>
             </a:r>
           </a:p>
         </p:txBody>
@@ -3294,8 +3294,8 @@
         </p:nvSpPr>
         <p:spPr>
           <a:xfrm>
-            <a:off x="15708138" y="9453427"/>
-            <a:ext cx="3921266" cy="830997"/>
+            <a:off x="21397311" y="9569410"/>
+            <a:ext cx="5689175" cy="830997"/>
           </a:xfrm>
           <a:prstGeom prst="rect">
             <a:avLst/>
@@ -3313,7 +3313,76 @@
                 <a:latin typeface="Arial" panose="020B0604020202020204" pitchFamily="34" charset="0"/>
                 <a:cs typeface="Arial" panose="020B0604020202020204" pitchFamily="34" charset="0"/>
               </a:rPr>
-              <a:t>E. 2025-2026</a:t>
+              <a:t>F. 2025-2026</a:t>
+            </a:r>
+          </a:p>
+        </p:txBody>
+      </p:sp>
+      <p:pic>
+        <p:nvPicPr>
+          <p:cNvPr id="3" name="Picture 2">
+            <a:extLst>
+              <a:ext uri="{FF2B5EF4-FFF2-40B4-BE49-F238E27FC236}">
+                <a16:creationId xmlns:a16="http://schemas.microsoft.com/office/drawing/2014/main" id="{EE1F435A-5A93-A668-F7FD-B7836142FA9D}"/>
+              </a:ext>
+            </a:extLst>
+          </p:cNvPr>
+          <p:cNvPicPr>
+            <a:picLocks noChangeAspect="1"/>
+          </p:cNvPicPr>
+          <p:nvPr/>
+        </p:nvPicPr>
+        <p:blipFill>
+          <a:blip r:embed="rId7"/>
+          <a:srcRect l="17641" t="19864" r="19204" b="22571"/>
+          <a:stretch>
+            <a:fillRect/>
+          </a:stretch>
+        </p:blipFill>
+        <p:spPr>
+          <a:xfrm>
+            <a:off x="431761" y="1221162"/>
+            <a:ext cx="8653551" cy="7887595"/>
+          </a:xfrm>
+          <a:prstGeom prst="rect">
+            <a:avLst/>
+          </a:prstGeom>
+        </p:spPr>
+      </p:pic>
+      <p:sp>
+        <p:nvSpPr>
+          <p:cNvPr id="4" name="TextBox 3">
+            <a:extLst>
+              <a:ext uri="{FF2B5EF4-FFF2-40B4-BE49-F238E27FC236}">
+                <a16:creationId xmlns:a16="http://schemas.microsoft.com/office/drawing/2014/main" id="{6925066E-65EB-DA1F-8692-7B9E045A3E51}"/>
+              </a:ext>
+            </a:extLst>
+          </p:cNvPr>
+          <p:cNvSpPr txBox="1"/>
+          <p:nvPr/>
+        </p:nvSpPr>
+        <p:spPr>
+          <a:xfrm>
+            <a:off x="2147085" y="160989"/>
+            <a:ext cx="3887603" cy="830997"/>
+          </a:xfrm>
+          <a:prstGeom prst="rect">
+            <a:avLst/>
+          </a:prstGeom>
+          <a:noFill/>
+        </p:spPr>
+        <p:txBody>
+          <a:bodyPr wrap="none" rtlCol="0">
+            <a:spAutoFit/>
+          </a:bodyPr>
+          <a:lstStyle/>
+          <a:p>
+            <a:r>
+              <a:rPr lang="en-US" sz="4800" dirty="0">
+                <a:latin typeface="Arial" panose="020B0604020202020204" pitchFamily="34" charset="0"/>
+                <a:cs typeface="Arial" panose="020B0604020202020204" pitchFamily="34" charset="0"/>
+              </a:rPr>
+              <a:t>A. 2005-2026</a:t>
             </a:r>
           </a:p>
         </p:txBody>
